--- a/docs/TreeAlarm-VMS-2026-ru.pptx
+++ b/docs/TreeAlarm-VMS-2026-ru.pptx
@@ -11,12 +11,14 @@
     <p:sldId id="259" r:id="rId10"/>
     <p:sldId id="260" r:id="rId11"/>
     <p:sldId id="261" r:id="rId12"/>
+    <p:sldId id="288" r:id="rId39"/>
     <p:sldId id="262" r:id="rId13"/>
     <p:sldId id="263" r:id="rId14"/>
     <p:sldId id="264" r:id="rId15"/>
     <p:sldId id="265" r:id="rId16"/>
     <p:sldId id="266" r:id="rId17"/>
     <p:sldId id="267" r:id="rId18"/>
+    <p:sldId id="289" r:id="rId40"/>
     <p:sldId id="268" r:id="rId19"/>
     <p:sldId id="269" r:id="rId20"/>
     <p:sldId id="270" r:id="rId21"/>
@@ -3405,7 +3407,7 @@
                 </a:solidFill>
                 <a:latin typeface="Calibri"/>
               </a:rPr>
-              <a:t>Обзор системы · новое: экономия места на дисках · связь с картой мониторинга TreeAlarm · 2026</a:t>
+              <a:t>Обзор системы · новое: камера сама ведёт объект · поиск человека по всем камерам · экономия места на дисках · связь с картой мониторинга TreeAlarm · 2026</a:t>
             </a:r>
           </a:p>
         </p:txBody>
@@ -3604,6 +3606,50 @@
               <a:t>•   Старые записи и картинки событий удаляются автоматически — по сроку хранения и по занятому месту, так что диск не забьётся незаметно.</a:t>
             </a:r>
           </a:p>
+          <a:p>
+            <a:pPr algn="l" marL="237744" indent="-237744">
+              <a:lnSpc>
+                <a:spcPct val="112000"/>
+              </a:lnSpc>
+              <a:spcBef>
+                <a:spcPts val="0"/>
+              </a:spcBef>
+              <a:spcAft>
+                <a:spcPts val="1100"/>
+              </a:spcAft>
+            </a:pPr>
+            <a:r>
+              <a:rPr sz="1700" b="0">
+                <a:solidFill>
+                  <a:srgbClr val="3E4C59"/>
+                </a:solidFill>
+                <a:latin typeface="Calibri"/>
+              </a:rPr>
+              <a:t>•   Если писать некуда — диск не назначен, не отвечает или выведен из эксплуатации, — система скажет об этом сразу и назовёт причину.</a:t>
+            </a:r>
+          </a:p>
+          <a:p>
+            <a:pPr algn="l" marL="237744" indent="-237744">
+              <a:lnSpc>
+                <a:spcPct val="112000"/>
+              </a:lnSpc>
+              <a:spcBef>
+                <a:spcPts val="0"/>
+              </a:spcBef>
+              <a:spcAft>
+                <a:spcPts val="1100"/>
+              </a:spcAft>
+            </a:pPr>
+            <a:r>
+              <a:rPr sz="1700" b="0">
+                <a:solidFill>
+                  <a:srgbClr val="3E4C59"/>
+                </a:solidFill>
+                <a:latin typeface="Calibri"/>
+              </a:rPr>
+              <a:t>•   В списке камер видно, какая пишет прямо сейчас, а у какой записи просто хранятся.</a:t>
+            </a:r>
+          </a:p>
         </p:txBody>
       </p:sp>
       <p:sp>
@@ -3691,7 +3737,7 @@
                 </a:solidFill>
                 <a:latin typeface="Calibri"/>
               </a:rPr>
-              <a:t>10</a:t>
+              <a:t>11</a:t>
             </a:r>
           </a:p>
         </p:txBody>
@@ -3909,7 +3955,29 @@
                 </a:solidFill>
                 <a:latin typeface="Calibri"/>
               </a:rPr>
-              <a:t>•   Работает на обычном сервере, видеокарта не обязательна. Пока камера выключена — не тратит ничего.</a:t>
+              <a:t>•   Режим «на охране» для этого не нужен: камера, которая просто пишет круглосуточно, тоже размечается событиями.</a:t>
+            </a:r>
+          </a:p>
+          <a:p>
+            <a:pPr algn="l" marL="237744" indent="-237744">
+              <a:lnSpc>
+                <a:spcPct val="112000"/>
+              </a:lnSpc>
+              <a:spcBef>
+                <a:spcPts val="0"/>
+              </a:spcBef>
+              <a:spcAft>
+                <a:spcPts val="1100"/>
+              </a:spcAft>
+            </a:pPr>
+            <a:r>
+              <a:rPr sz="1450" b="0">
+                <a:solidFill>
+                  <a:srgbClr val="3E4C59"/>
+                </a:solidFill>
+                <a:latin typeface="Calibri"/>
+              </a:rPr>
+              <a:t>•   Работает на обычном сервере, видеокарта не обязательна. Распознавание берёт с камеры собственный поток и не отнимает картинку у оператора.</a:t>
             </a:r>
           </a:p>
         </p:txBody>
@@ -4112,7 +4180,7 @@
                 </a:solidFill>
                 <a:latin typeface="Calibri"/>
               </a:rPr>
-              <a:t>11</a:t>
+              <a:t>12</a:t>
             </a:r>
           </a:p>
         </p:txBody>
@@ -4420,7 +4488,7 @@
                 </a:solidFill>
                 <a:latin typeface="Calibri"/>
               </a:rPr>
-              <a:t>12</a:t>
+              <a:t>13</a:t>
             </a:r>
           </a:p>
         </p:txBody>
@@ -4819,7 +4887,7 @@
                 </a:solidFill>
                 <a:latin typeface="Calibri"/>
               </a:rPr>
-              <a:t>13</a:t>
+              <a:t>15</a:t>
             </a:r>
           </a:p>
         </p:txBody>
@@ -5218,7 +5286,7 @@
                 </a:solidFill>
                 <a:latin typeface="Calibri"/>
               </a:rPr>
-              <a:t>14</a:t>
+              <a:t>16</a:t>
             </a:r>
           </a:p>
         </p:txBody>
@@ -5504,7 +5572,7 @@
                 </a:solidFill>
                 <a:latin typeface="Calibri"/>
               </a:rPr>
-              <a:t>15</a:t>
+              <a:t>17</a:t>
             </a:r>
           </a:p>
         </p:txBody>
@@ -5812,7 +5880,7 @@
                 </a:solidFill>
                 <a:latin typeface="Calibri"/>
               </a:rPr>
-              <a:t>16</a:t>
+              <a:t>18</a:t>
             </a:r>
           </a:p>
         </p:txBody>
@@ -6361,7 +6429,7 @@
                 </a:solidFill>
                 <a:latin typeface="Calibri"/>
               </a:rPr>
-              <a:t>18</a:t>
+              <a:t>20</a:t>
             </a:r>
           </a:p>
         </p:txBody>
@@ -7198,7 +7266,7 @@
                 </a:solidFill>
                 <a:latin typeface="Calibri"/>
               </a:rPr>
-              <a:t>19</a:t>
+              <a:t>21</a:t>
             </a:r>
           </a:p>
         </p:txBody>
@@ -7372,7 +7440,29 @@
                 </a:solidFill>
                 <a:latin typeface="Calibri"/>
               </a:rPr>
-              <a:t>•   Новое: система научилась сама ужимать архив так, чтобы он занимал почти вдвое меньше места, а важное в кадре осталось чётким.</a:t>
+              <a:t>•   Новое: камера сама ведёт объект в кадре, а человека или машину можно найти сразу по всем камерам.</a:t>
+            </a:r>
+          </a:p>
+          <a:p>
+            <a:pPr algn="l" marL="237744" indent="-237744">
+              <a:lnSpc>
+                <a:spcPct val="112000"/>
+              </a:lnSpc>
+              <a:spcBef>
+                <a:spcPts val="0"/>
+              </a:spcBef>
+              <a:spcAft>
+                <a:spcPts val="1100"/>
+              </a:spcAft>
+            </a:pPr>
+            <a:r>
+              <a:rPr sz="1600" b="0">
+                <a:solidFill>
+                  <a:srgbClr val="3E4C59"/>
+                </a:solidFill>
+                <a:latin typeface="Calibri"/>
+              </a:rPr>
+              <a:t>•   Новое: архив ужимается сам — важное в кадре остаётся чётким, а места нужно заметно меньше.</a:t>
             </a:r>
           </a:p>
           <a:p>
@@ -7682,7 +7772,7 @@
                 </a:solidFill>
                 <a:latin typeface="Calibri"/>
               </a:rPr>
-              <a:t>•   Записи, в которых что-то происходило, стали занимать примерно вдвое меньше места.</a:t>
+              <a:t>•   Записи, где что-то происходило, весят меньше: почти вдвое на тесте, на пятую часть на реальном архиве.</a:t>
             </a:r>
           </a:p>
           <a:p>
@@ -7704,7 +7794,7 @@
                 </a:solidFill>
                 <a:latin typeface="Calibri"/>
               </a:rPr>
-              <a:t>•   На том же диске архив живёт заметно дольше: вместо десяти дней — около шестнадцати-семнадцати.</a:t>
+              <a:t>•   Экономия тем больше, чем меньшую часть кадра занимает важное.</a:t>
             </a:r>
           </a:p>
           <a:p>
@@ -7726,7 +7816,29 @@
                 </a:solidFill>
                 <a:latin typeface="Calibri"/>
               </a:rPr>
-              <a:t>•   Качество там, где в кадре был человек или машина, при этом не упало.</a:t>
+              <a:t>•   На том же диске архив живёт двенадцать-семнадцать дней вместо десяти.</a:t>
+            </a:r>
+          </a:p>
+          <a:p>
+            <a:pPr algn="l" marL="237744" indent="-237744">
+              <a:lnSpc>
+                <a:spcPct val="112000"/>
+              </a:lnSpc>
+              <a:spcBef>
+                <a:spcPts val="0"/>
+              </a:spcBef>
+              <a:spcAft>
+                <a:spcPts val="1100"/>
+              </a:spcAft>
+            </a:pPr>
+            <a:r>
+              <a:rPr sz="1450" b="0">
+                <a:solidFill>
+                  <a:srgbClr val="3E4C59"/>
+                </a:solidFill>
+                <a:latin typeface="Calibri"/>
+              </a:rPr>
+              <a:t>•   Качество там, где был человек или машина, не падает; выигрыша нет — остаётся оригинал.</a:t>
             </a:r>
           </a:p>
         </p:txBody>
@@ -7771,7 +7883,7 @@
                 </a:solidFill>
                 <a:latin typeface="Calibri"/>
               </a:rPr>
-              <a:t>HEVC и H.264⁵ — два распространённых способа сжатия видео; проверили оба. Измерено на тестовой записи. Расчёт дней хранения — для записей, в которых система что-то нашла: те, где ничего не происходило, пересжатие не трогает.</a:t>
+              <a:t>HEVC и H.264⁵ — два распространённых способа сжатия видео; проверили оба. На диаграмме — тестовая запись 1280×720; на клипе реального архива 2688×1520 экономия около пятой части. Пересжатие не трогает записи, в которых ничего не происходило.</a:t>
             </a:r>
           </a:p>
         </p:txBody>
@@ -7861,7 +7973,7 @@
                 </a:solidFill>
                 <a:latin typeface="Calibri"/>
               </a:rPr>
-              <a:t>20</a:t>
+              <a:t>22</a:t>
             </a:r>
           </a:p>
         </p:txBody>
@@ -8260,7 +8372,7 @@
                 </a:solidFill>
                 <a:latin typeface="Calibri"/>
               </a:rPr>
-              <a:t>21</a:t>
+              <a:t>23</a:t>
             </a:r>
           </a:p>
         </p:txBody>
@@ -8456,7 +8568,7 @@
                 </a:solidFill>
                 <a:latin typeface="Calibri"/>
               </a:rPr>
-              <a:t>•   Насколько «оживлённой» должна быть запись, чтобы её вообще трогать. Если в кадре почти всё время кто-то есть, экономить особо нечего.</a:t>
+              <a:t>•   Какую часть кадра должны занимать объекты, чтобы запись вообще трогать: если человек стоит вплотную к камере, экономить не из чего.</a:t>
             </a:r>
           </a:p>
           <a:p>
@@ -8568,7 +8680,7 @@
                 </a:solidFill>
                 <a:latin typeface="Calibri"/>
               </a:rPr>
-              <a:t>22</a:t>
+              <a:t>24</a:t>
             </a:r>
           </a:p>
         </p:txBody>
@@ -9230,7 +9342,7 @@
                 </a:solidFill>
                 <a:latin typeface="Calibri"/>
               </a:rPr>
-              <a:t>24</a:t>
+              <a:t>26</a:t>
             </a:r>
           </a:p>
         </p:txBody>
@@ -9720,7 +9832,7 @@
                 </a:solidFill>
                 <a:latin typeface="Calibri"/>
               </a:rPr>
-              <a:t>25</a:t>
+              <a:t>27</a:t>
             </a:r>
           </a:p>
         </p:txBody>
@@ -10185,7 +10297,7 @@
                 </a:solidFill>
                 <a:latin typeface="Calibri"/>
               </a:rPr>
-              <a:t>26</a:t>
+              <a:t>28</a:t>
             </a:r>
           </a:p>
         </p:txBody>
@@ -10515,7 +10627,7 @@
                 </a:solidFill>
                 <a:latin typeface="Calibri"/>
               </a:rPr>
-              <a:t>27</a:t>
+              <a:t>29</a:t>
             </a:r>
           </a:p>
         </p:txBody>
@@ -11214,7 +11326,7 @@
                 </a:solidFill>
                 <a:latin typeface="Calibri"/>
               </a:rPr>
-              <a:t>28</a:t>
+              <a:t>30</a:t>
             </a:r>
           </a:p>
         </p:txBody>
@@ -11818,7 +11930,7 @@
         </p:nvGraphicFramePr>
         <p:xfrm>
           <a:off x="685800" y="1572768"/>
-          <a:ext cx="10820095" cy="3968496"/>
+          <a:ext cx="10820095" cy="3511296"/>
         </p:xfrm>
         <a:graphic>
           <a:graphicData uri="http://schemas.openxmlformats.org/drawingml/2006/table">
@@ -11830,7 +11942,7 @@
                 <a:gridCol w="3200400"/>
                 <a:gridCol w="7619695"/>
               </a:tblGrid>
-              <a:tr h="566928">
+              <a:tr h="438912">
                 <a:tc>
                   <a:txBody>
                     <a:bodyPr wrap="square"/>
@@ -11898,7 +12010,7 @@
                   </a:tcPr>
                 </a:tc>
               </a:tr>
-              <a:tr h="566928">
+              <a:tr h="438912">
                 <a:tc>
                   <a:txBody>
                     <a:bodyPr wrap="square"/>
@@ -11955,7 +12067,7 @@
                           </a:solidFill>
                           <a:latin typeface="Calibri"/>
                         </a:rPr>
-                        <a:t>WebRTC / WHEP через шлюз: браузер не обращается к медиасерверу напрямую</a:t>
+                        <a:t>WebRTC / WHEP через шлюз: браузер не обращается к медиасерверу напрямую. H.265 отдаётся как есть; перекодирование в H.264 — на VA-API, с откатом на CPU</a:t>
                       </a:r>
                     </a:p>
                   </a:txBody>
@@ -11966,7 +12078,7 @@
                   </a:tcPr>
                 </a:tc>
               </a:tr>
-              <a:tr h="566928">
+              <a:tr h="438912">
                 <a:tc>
                   <a:txBody>
                     <a:bodyPr wrap="square"/>
@@ -12034,7 +12146,7 @@
                   </a:tcPr>
                 </a:tc>
               </a:tr>
-              <a:tr h="566928">
+              <a:tr h="438912">
                 <a:tc>
                   <a:txBody>
                     <a:bodyPr wrap="square"/>
@@ -12102,7 +12214,7 @@
                   </a:tcPr>
                 </a:tc>
               </a:tr>
-              <a:tr h="566928">
+              <a:tr h="438912">
                 <a:tc>
                   <a:txBody>
                     <a:bodyPr wrap="square"/>
@@ -12170,7 +12282,7 @@
                   </a:tcPr>
                 </a:tc>
               </a:tr>
-              <a:tr h="566928">
+              <a:tr h="438912">
                 <a:tc>
                   <a:txBody>
                     <a:bodyPr wrap="square"/>
@@ -12238,7 +12350,7 @@
                   </a:tcPr>
                 </a:tc>
               </a:tr>
-              <a:tr h="566928">
+              <a:tr h="438912">
                 <a:tc>
                   <a:txBody>
                     <a:bodyPr wrap="square"/>
@@ -12306,6 +12418,74 @@
                   </a:tcPr>
                 </a:tc>
               </a:tr>
+              <a:tr h="438912">
+                <a:tc>
+                  <a:txBody>
+                    <a:bodyPr wrap="square"/>
+                    <a:lstStyle/>
+                    <a:p>
+                      <a:pPr algn="l">
+                        <a:lnSpc>
+                          <a:spcPct val="105000"/>
+                        </a:lnSpc>
+                        <a:spcBef>
+                          <a:spcPts val="0"/>
+                        </a:spcBef>
+                        <a:spcAft>
+                          <a:spcPts val="0"/>
+                        </a:spcAft>
+                      </a:pPr>
+                      <a:r>
+                        <a:rPr sz="1350" b="1">
+                          <a:solidFill>
+                            <a:srgbClr val="1F2933"/>
+                          </a:solidFill>
+                          <a:latin typeface="Calibri"/>
+                        </a:rPr>
+                        <a:t>Автонаведение и поиск</a:t>
+                      </a:r>
+                    </a:p>
+                  </a:txBody>
+                  <a:tcPr marL="146304" marR="146304" marT="64008" marB="64008" anchor="ctr">
+                    <a:solidFill>
+                      <a:srgbClr val="F5F7FA"/>
+                    </a:solidFill>
+                  </a:tcPr>
+                </a:tc>
+                <a:tc>
+                  <a:txBody>
+                    <a:bodyPr wrap="square"/>
+                    <a:lstStyle/>
+                    <a:p>
+                      <a:pPr algn="l">
+                        <a:lnSpc>
+                          <a:spcPct val="105000"/>
+                        </a:lnSpc>
+                        <a:spcBef>
+                          <a:spcPts val="0"/>
+                        </a:spcBef>
+                        <a:spcAft>
+                          <a:spcPts val="0"/>
+                        </a:spcAft>
+                      </a:pPr>
+                      <a:r>
+                        <a:rPr sz="1300" b="0">
+                          <a:solidFill>
+                            <a:srgbClr val="3E4C59"/>
+                          </a:solidFill>
+                          <a:latin typeface="Calibri"/>
+                        </a:rPr>
+                        <a:t>Один контур управления на камеру, цель по детекциям CV/ONVIF, калибровка монтажа; поиск похожих — по Re-ID (человек, лицо, транспорт, номер)</a:t>
+                      </a:r>
+                    </a:p>
+                  </a:txBody>
+                  <a:tcPr marL="146304" marR="146304" marT="64008" marB="64008" anchor="ctr">
+                    <a:solidFill>
+                      <a:srgbClr val="F5F7FA"/>
+                    </a:solidFill>
+                  </a:tcPr>
+                </a:tc>
+              </a:tr>
             </a:tbl>
           </a:graphicData>
         </a:graphic>
@@ -12440,7 +12620,7 @@
                 </a:solidFill>
                 <a:latin typeface="Calibri"/>
               </a:rPr>
-              <a:t>30</a:t>
+              <a:t>32</a:t>
             </a:r>
           </a:p>
         </p:txBody>
@@ -12658,7 +12838,7 @@
                 </a:solidFill>
                 <a:latin typeface="Calibri"/>
               </a:rPr>
-              <a:t>•   Замер на тестовой сцене 1280×720 при CQP 28 на Intel Quick Sync: HEVC 8,38 → 4,82 МБ (−42%), H.264 7,05 → 4,50 МБ (−36%). SSIM в зоне интереса: 0,9997 → 0,9949 на HEVC и 0,9993 → 0,9999 на H.264.</a:t>
+              <a:t>•   Замер на тестовой сцене 1280×720 при CQP 28 на Intel Quick Sync: HEVC 8,38 → 4,82 МБ (−42%), H.264 7,05 → 4,50 МБ (−36%). На клипе реального архива 2688×1520 — 39,55 → 31,23 МБ: защита выдаётся по бюджету площади кадра, иначе на крупных объектах файл растёт.</a:t>
             </a:r>
           </a:p>
           <a:p>
@@ -12681,6 +12861,28 @@
                 <a:latin typeface="Calibri"/>
               </a:rPr>
               <a:t>•   Поле вокруг рамки важнее силы усиления: расширение с 0 до 64 пикселей даёт вдесятеро больший выигрыш, чем утроение дельты QP, при том же размере файла.</a:t>
+            </a:r>
+          </a:p>
+          <a:p>
+            <a:pPr algn="l" marL="237744" indent="-237744">
+              <a:lnSpc>
+                <a:spcPct val="112000"/>
+              </a:lnSpc>
+              <a:spcBef>
+                <a:spcPts val="0"/>
+              </a:spcBef>
+              <a:spcAft>
+                <a:spcPts val="1100"/>
+              </a:spcAft>
+            </a:pPr>
+            <a:r>
+              <a:rPr sz="1500" b="0">
+                <a:solidFill>
+                  <a:srgbClr val="3E4C59"/>
+                </a:solidFill>
+                <a:latin typeface="Calibri"/>
+              </a:rPr>
+              <a:t>•   Живой транскод HEVC→H.264 идёт через ту же библиотеку: декодирование и кодирование на VA-API, −43% CPU на поток (i7-12700, iGPU). Где браузер понимает H.265, транскода нет вовсе.</a:t>
             </a:r>
           </a:p>
         </p:txBody>
@@ -12770,7 +12972,7 @@
                 </a:solidFill>
                 <a:latin typeface="Calibri"/>
               </a:rPr>
-              <a:t>31</a:t>
+              <a:t>33</a:t>
             </a:r>
           </a:p>
         </p:txBody>
@@ -12944,7 +13146,7 @@
                 </a:solidFill>
                 <a:latin typeface="Calibri"/>
               </a:rPr>
-              <a:t>•   Новое: архив занимает почти вдвое меньше места на записях, где что-то происходило, — при этом номер и лицо остаются читаемыми.</a:t>
+              <a:t>•   Новое: камера сама ведёт объект в кадре, человека или машину можно найти сразу по всем камерам, а архив занимает заметно меньше места — номер и лицо при этом остаются читаемыми.</a:t>
             </a:r>
           </a:p>
           <a:p>
@@ -13199,7 +13401,689 @@
                 </a:solidFill>
                 <a:latin typeface="Calibri"/>
               </a:rPr>
-              <a:t>32</a:t>
+              <a:t>34</a:t>
+            </a:r>
+          </a:p>
+        </p:txBody>
+      </p:sp>
+    </p:spTree>
+  </p:cSld>
+  <p:clrMapOvr>
+    <a:masterClrMapping/>
+  </p:clrMapOvr>
+</p:sld>
+</file>
+
+<file path=ppt/slides/slide33.xml><?xml version="1.0" encoding="utf-8"?>
+<p:sld xmlns:a="http://schemas.openxmlformats.org/drawingml/2006/main" xmlns:p="http://schemas.openxmlformats.org/presentationml/2006/main" xmlns:r="http://schemas.openxmlformats.org/officeDocument/2006/relationships">
+  <p:cSld>
+    <p:spTree>
+      <p:nvGrpSpPr>
+        <p:cNvPr id="1" name=""/>
+        <p:cNvGrpSpPr/>
+        <p:nvPr/>
+      </p:nvGrpSpPr>
+      <p:grpSpPr/>
+      <p:sp>
+        <p:nvSpPr>
+          <p:cNvPr id="2" name="TextBox 1"/>
+          <p:cNvSpPr txBox="1"/>
+          <p:nvPr/>
+        </p:nvSpPr>
+        <p:spPr>
+          <a:xfrm>
+            <a:off x="685800" y="475488"/>
+            <a:ext cx="10820095" cy="868680"/>
+          </a:xfrm>
+          <a:prstGeom prst="rect">
+            <a:avLst/>
+          </a:prstGeom>
+          <a:noFill/>
+        </p:spPr>
+        <p:txBody>
+          <a:bodyPr wrap="square" lIns="0" rIns="0" tIns="0" bIns="0" anchor="t">
+            <a:spAutoFit/>
+          </a:bodyPr>
+          <a:lstStyle/>
+          <a:p>
+            <a:pPr algn="l">
+              <a:lnSpc>
+                <a:spcPct val="95000"/>
+              </a:lnSpc>
+              <a:spcBef>
+                <a:spcPts val="0"/>
+              </a:spcBef>
+              <a:spcAft>
+                <a:spcPts val="0"/>
+              </a:spcAft>
+            </a:pPr>
+            <a:r>
+              <a:rPr sz="3000" b="1">
+                <a:solidFill>
+                  <a:srgbClr val="1F2933"/>
+                </a:solidFill>
+                <a:latin typeface="Calibri"/>
+              </a:rPr>
+              <a:t>Камера сама ведёт объект</a:t>
+            </a:r>
+          </a:p>
+        </p:txBody>
+      </p:sp>
+      <p:sp>
+        <p:nvSpPr>
+          <p:cNvPr id="3" name="Rectangle 2"/>
+          <p:cNvSpPr/>
+          <p:nvPr/>
+        </p:nvSpPr>
+        <p:spPr>
+          <a:xfrm>
+            <a:off x="685800" y="1243584"/>
+            <a:ext cx="1051560" cy="50292"/>
+          </a:xfrm>
+          <a:prstGeom prst="rect">
+            <a:avLst/>
+          </a:prstGeom>
+          <a:solidFill>
+            <a:srgbClr val="D6291E"/>
+          </a:solidFill>
+          <a:ln>
+            <a:noFill/>
+          </a:ln>
+          <a:effectLst/>
+        </p:spPr>
+        <p:style>
+          <a:lnRef idx="1">
+            <a:schemeClr val="accent1"/>
+          </a:lnRef>
+          <a:fillRef idx="3">
+            <a:schemeClr val="accent1"/>
+          </a:fillRef>
+          <a:effectRef idx="2">
+            <a:schemeClr val="accent1"/>
+          </a:effectRef>
+          <a:fontRef idx="minor">
+            <a:schemeClr val="lt1"/>
+          </a:fontRef>
+        </p:style>
+        <p:txBody>
+          <a:bodyPr rtlCol="0" anchor="ctr"/>
+          <a:lstStyle/>
+          <a:p>
+            <a:pPr algn="ctr"/>
+          </a:p>
+        </p:txBody>
+      </p:sp>
+      <p:sp>
+        <p:nvSpPr>
+          <p:cNvPr id="4" name="TextBox 3"/>
+          <p:cNvSpPr txBox="1"/>
+          <p:nvPr/>
+        </p:nvSpPr>
+        <p:spPr>
+          <a:xfrm>
+            <a:off x="685800" y="1572768"/>
+            <a:ext cx="10454335" cy="4690872"/>
+          </a:xfrm>
+          <a:prstGeom prst="rect">
+            <a:avLst/>
+          </a:prstGeom>
+          <a:noFill/>
+        </p:spPr>
+        <p:txBody>
+          <a:bodyPr wrap="square" lIns="0" rIns="0" tIns="0" bIns="0" anchor="ctr">
+            <a:spAutoFit/>
+          </a:bodyPr>
+          <a:lstStyle/>
+          <a:p>
+            <a:pPr algn="l" marL="237744" indent="-237744">
+              <a:lnSpc>
+                <a:spcPct val="112000"/>
+              </a:lnSpc>
+              <a:spcBef>
+                <a:spcPts val="0"/>
+              </a:spcBef>
+              <a:spcAft>
+                <a:spcPts val="1100"/>
+              </a:spcAft>
+            </a:pPr>
+            <a:r>
+              <a:rPr sz="1500" b="0">
+                <a:solidFill>
+                  <a:srgbClr val="3E4C59"/>
+                </a:solidFill>
+                <a:latin typeface="Calibri"/>
+              </a:rPr>
+              <a:t>•   Оператор щёлкает по человеку или машине в кадре — поворотная камера дальше держит его в кадре сама.</a:t>
+            </a:r>
+          </a:p>
+          <a:p>
+            <a:pPr algn="l" marL="237744" indent="-237744">
+              <a:lnSpc>
+                <a:spcPct val="112000"/>
+              </a:lnSpc>
+              <a:spcBef>
+                <a:spcPts val="0"/>
+              </a:spcBef>
+              <a:spcAft>
+                <a:spcPts val="1100"/>
+              </a:spcAft>
+            </a:pPr>
+            <a:r>
+              <a:rPr sz="1500" b="0">
+                <a:solidFill>
+                  <a:srgbClr val="3E4C59"/>
+                </a:solidFill>
+                <a:latin typeface="Calibri"/>
+              </a:rPr>
+              <a:t>•   Можно не щёлкать: камере задаётся, за кем следить в первую очередь, и она выбирает цель сама — круглосуточно, даже когда никто не смотрит.</a:t>
+            </a:r>
+          </a:p>
+          <a:p>
+            <a:pPr algn="l" marL="237744" indent="-237744">
+              <a:lnSpc>
+                <a:spcPct val="112000"/>
+              </a:lnSpc>
+              <a:spcBef>
+                <a:spcPts val="0"/>
+              </a:spcBef>
+              <a:spcAft>
+                <a:spcPts val="1100"/>
+              </a:spcAft>
+            </a:pPr>
+            <a:r>
+              <a:rPr sz="1500" b="0">
+                <a:solidFill>
+                  <a:srgbClr val="3E4C59"/>
+                </a:solidFill>
+                <a:latin typeface="Calibri"/>
+              </a:rPr>
+              <a:t>•   Камера не гоняется за центром кадра, а не даёт объекту уйти за край: картинка не дёргается зря.</a:t>
+            </a:r>
+          </a:p>
+          <a:p>
+            <a:pPr algn="l" marL="237744" indent="-237744">
+              <a:lnSpc>
+                <a:spcPct val="112000"/>
+              </a:lnSpc>
+              <a:spcBef>
+                <a:spcPts val="0"/>
+              </a:spcBef>
+              <a:spcAft>
+                <a:spcPts val="1100"/>
+              </a:spcAft>
+            </a:pPr>
+            <a:r>
+              <a:rPr sz="1500" b="0">
+                <a:solidFill>
+                  <a:srgbClr val="3E4C59"/>
+                </a:solidFill>
+                <a:latin typeface="Calibri"/>
+              </a:rPr>
+              <a:t>•   Объект пропал на секунду — камера узнаёт его по внешнему виду и продолжает вести того же, а не первого попавшегося.</a:t>
+            </a:r>
+          </a:p>
+          <a:p>
+            <a:pPr algn="l" marL="237744" indent="-237744">
+              <a:lnSpc>
+                <a:spcPct val="112000"/>
+              </a:lnSpc>
+              <a:spcBef>
+                <a:spcPts val="0"/>
+              </a:spcBef>
+              <a:spcAft>
+                <a:spcPts val="1100"/>
+              </a:spcAft>
+            </a:pPr>
+            <a:r>
+              <a:rPr sz="1500" b="0">
+                <a:solidFill>
+                  <a:srgbClr val="3E4C59"/>
+                </a:solidFill>
+                <a:latin typeface="Calibri"/>
+              </a:rPr>
+              <a:t>•   Каждую камеру система один раз обучает сама: пробует повернуть и смотрит, куда поехала картинка. Поэтому камеру, висящую хоть боком, ведёт правильно.</a:t>
+            </a:r>
+          </a:p>
+        </p:txBody>
+      </p:sp>
+      <p:sp>
+        <p:nvSpPr>
+          <p:cNvPr id="5" name="TextBox 4"/>
+          <p:cNvSpPr txBox="1"/>
+          <p:nvPr/>
+        </p:nvSpPr>
+        <p:spPr>
+          <a:xfrm>
+            <a:off x="685800" y="6355080"/>
+            <a:ext cx="10820095" cy="274320"/>
+          </a:xfrm>
+          <a:prstGeom prst="rect">
+            <a:avLst/>
+          </a:prstGeom>
+          <a:noFill/>
+        </p:spPr>
+        <p:txBody>
+          <a:bodyPr wrap="square" lIns="0" rIns="0" tIns="0" bIns="0" anchor="t">
+            <a:spAutoFit/>
+          </a:bodyPr>
+          <a:lstStyle/>
+          <a:p>
+            <a:pPr algn="l">
+              <a:lnSpc>
+                <a:spcPct val="100000"/>
+              </a:lnSpc>
+              <a:spcBef>
+                <a:spcPts val="0"/>
+              </a:spcBef>
+              <a:spcAft>
+                <a:spcPts val="0"/>
+              </a:spcAft>
+            </a:pPr>
+            <a:r>
+              <a:rPr sz="900" b="0">
+                <a:solidFill>
+                  <a:srgbClr val="7B8794"/>
+                </a:solidFill>
+                <a:latin typeface="Calibri"/>
+              </a:rPr>
+              <a:t>TreeAlarm VMS · treealarm.dev</a:t>
+            </a:r>
+          </a:p>
+        </p:txBody>
+      </p:sp>
+      <p:sp>
+        <p:nvSpPr>
+          <p:cNvPr id="6" name="TextBox 5"/>
+          <p:cNvSpPr txBox="1"/>
+          <p:nvPr/>
+        </p:nvSpPr>
+        <p:spPr>
+          <a:xfrm>
+            <a:off x="10591495" y="6355080"/>
+            <a:ext cx="914400" cy="274320"/>
+          </a:xfrm>
+          <a:prstGeom prst="rect">
+            <a:avLst/>
+          </a:prstGeom>
+          <a:noFill/>
+        </p:spPr>
+        <p:txBody>
+          <a:bodyPr wrap="square" lIns="0" rIns="0" tIns="0" bIns="0" anchor="t">
+            <a:spAutoFit/>
+          </a:bodyPr>
+          <a:lstStyle/>
+          <a:p>
+            <a:pPr algn="r">
+              <a:lnSpc>
+                <a:spcPct val="100000"/>
+              </a:lnSpc>
+              <a:spcBef>
+                <a:spcPts val="0"/>
+              </a:spcBef>
+              <a:spcAft>
+                <a:spcPts val="0"/>
+              </a:spcAft>
+            </a:pPr>
+            <a:r>
+              <a:rPr sz="900" b="0">
+                <a:solidFill>
+                  <a:srgbClr val="7B8794"/>
+                </a:solidFill>
+                <a:latin typeface="Calibri"/>
+              </a:rPr>
+              <a:t>7</a:t>
+            </a:r>
+          </a:p>
+        </p:txBody>
+      </p:sp>
+    </p:spTree>
+  </p:cSld>
+  <p:clrMapOvr>
+    <a:masterClrMapping/>
+  </p:clrMapOvr>
+</p:sld>
+</file>
+
+<file path=ppt/slides/slide34.xml><?xml version="1.0" encoding="utf-8"?>
+<p:sld xmlns:a="http://schemas.openxmlformats.org/drawingml/2006/main" xmlns:p="http://schemas.openxmlformats.org/presentationml/2006/main" xmlns:r="http://schemas.openxmlformats.org/officeDocument/2006/relationships">
+  <p:cSld>
+    <p:spTree>
+      <p:nvGrpSpPr>
+        <p:cNvPr id="1" name=""/>
+        <p:cNvGrpSpPr/>
+        <p:nvPr/>
+      </p:nvGrpSpPr>
+      <p:grpSpPr/>
+      <p:sp>
+        <p:nvSpPr>
+          <p:cNvPr id="2" name="TextBox 1"/>
+          <p:cNvSpPr txBox="1"/>
+          <p:nvPr/>
+        </p:nvSpPr>
+        <p:spPr>
+          <a:xfrm>
+            <a:off x="685800" y="475488"/>
+            <a:ext cx="10820095" cy="868680"/>
+          </a:xfrm>
+          <a:prstGeom prst="rect">
+            <a:avLst/>
+          </a:prstGeom>
+          <a:noFill/>
+        </p:spPr>
+        <p:txBody>
+          <a:bodyPr wrap="square" lIns="0" rIns="0" tIns="0" bIns="0" anchor="t">
+            <a:spAutoFit/>
+          </a:bodyPr>
+          <a:lstStyle/>
+          <a:p>
+            <a:pPr algn="l">
+              <a:lnSpc>
+                <a:spcPct val="95000"/>
+              </a:lnSpc>
+              <a:spcBef>
+                <a:spcPts val="0"/>
+              </a:spcBef>
+              <a:spcAft>
+                <a:spcPts val="0"/>
+              </a:spcAft>
+            </a:pPr>
+            <a:r>
+              <a:rPr sz="3000" b="1">
+                <a:solidFill>
+                  <a:srgbClr val="1F2933"/>
+                </a:solidFill>
+                <a:latin typeface="Calibri"/>
+              </a:rPr>
+              <a:t>Найти этого же человека на других камерах</a:t>
+            </a:r>
+          </a:p>
+        </p:txBody>
+      </p:sp>
+      <p:sp>
+        <p:nvSpPr>
+          <p:cNvPr id="3" name="Rectangle 2"/>
+          <p:cNvSpPr/>
+          <p:nvPr/>
+        </p:nvSpPr>
+        <p:spPr>
+          <a:xfrm>
+            <a:off x="685800" y="1243584"/>
+            <a:ext cx="1051560" cy="50292"/>
+          </a:xfrm>
+          <a:prstGeom prst="rect">
+            <a:avLst/>
+          </a:prstGeom>
+          <a:solidFill>
+            <a:srgbClr val="D6291E"/>
+          </a:solidFill>
+          <a:ln>
+            <a:noFill/>
+          </a:ln>
+          <a:effectLst/>
+        </p:spPr>
+        <p:style>
+          <a:lnRef idx="1">
+            <a:schemeClr val="accent1"/>
+          </a:lnRef>
+          <a:fillRef idx="3">
+            <a:schemeClr val="accent1"/>
+          </a:fillRef>
+          <a:effectRef idx="2">
+            <a:schemeClr val="accent1"/>
+          </a:effectRef>
+          <a:fontRef idx="minor">
+            <a:schemeClr val="lt1"/>
+          </a:fontRef>
+        </p:style>
+        <p:txBody>
+          <a:bodyPr rtlCol="0" anchor="ctr"/>
+          <a:lstStyle/>
+          <a:p>
+            <a:pPr algn="ctr"/>
+          </a:p>
+        </p:txBody>
+      </p:sp>
+      <p:sp>
+        <p:nvSpPr>
+          <p:cNvPr id="4" name="TextBox 3"/>
+          <p:cNvSpPr txBox="1"/>
+          <p:nvPr/>
+        </p:nvSpPr>
+        <p:spPr>
+          <a:xfrm>
+            <a:off x="685800" y="1572768"/>
+            <a:ext cx="10454335" cy="4690872"/>
+          </a:xfrm>
+          <a:prstGeom prst="rect">
+            <a:avLst/>
+          </a:prstGeom>
+          <a:noFill/>
+        </p:spPr>
+        <p:txBody>
+          <a:bodyPr wrap="square" lIns="0" rIns="0" tIns="0" bIns="0" anchor="ctr">
+            <a:spAutoFit/>
+          </a:bodyPr>
+          <a:lstStyle/>
+          <a:p>
+            <a:pPr algn="l" marL="237744" indent="-237744">
+              <a:lnSpc>
+                <a:spcPct val="112000"/>
+              </a:lnSpc>
+              <a:spcBef>
+                <a:spcPts val="0"/>
+              </a:spcBef>
+              <a:spcAft>
+                <a:spcPts val="1100"/>
+              </a:spcAft>
+            </a:pPr>
+            <a:r>
+              <a:rPr sz="1500" b="0">
+                <a:solidFill>
+                  <a:srgbClr val="3E4C59"/>
+                </a:solidFill>
+                <a:latin typeface="Calibri"/>
+              </a:rPr>
+              <a:t>•   Щёлкнули по человеку в кадре или по картинке события — система показывает, где ещё он попадал в объектив: на каких камерах и когда.</a:t>
+            </a:r>
+          </a:p>
+          <a:p>
+            <a:pPr algn="l" marL="237744" indent="-237744">
+              <a:lnSpc>
+                <a:spcPct val="112000"/>
+              </a:lnSpc>
+              <a:spcBef>
+                <a:spcPts val="0"/>
+              </a:spcBef>
+              <a:spcAft>
+                <a:spcPts val="1100"/>
+              </a:spcAft>
+            </a:pPr>
+            <a:r>
+              <a:rPr sz="1500" b="0">
+                <a:solidFill>
+                  <a:srgbClr val="3E4C59"/>
+                </a:solidFill>
+                <a:latin typeface="Calibri"/>
+              </a:rPr>
+              <a:t>•   Искать можно и по фотографии: загрузили снимок — система найдёт похожие появления в архиве.</a:t>
+            </a:r>
+          </a:p>
+          <a:p>
+            <a:pPr algn="l" marL="237744" indent="-237744">
+              <a:lnSpc>
+                <a:spcPct val="112000"/>
+              </a:lnSpc>
+              <a:spcBef>
+                <a:spcPts val="0"/>
+              </a:spcBef>
+              <a:spcAft>
+                <a:spcPts val="1100"/>
+              </a:spcAft>
+            </a:pPr>
+            <a:r>
+              <a:rPr sz="1500" b="0">
+                <a:solidFill>
+                  <a:srgbClr val="3E4C59"/>
+                </a:solidFill>
+                <a:latin typeface="Calibri"/>
+              </a:rPr>
+              <a:t>•   Работает по людям, лицам, машинам и автомобильным номерам.</a:t>
+            </a:r>
+          </a:p>
+          <a:p>
+            <a:pPr algn="l" marL="237744" indent="-237744">
+              <a:lnSpc>
+                <a:spcPct val="112000"/>
+              </a:lnSpc>
+              <a:spcBef>
+                <a:spcPts val="0"/>
+              </a:spcBef>
+              <a:spcAft>
+                <a:spcPts val="1100"/>
+              </a:spcAft>
+            </a:pPr>
+            <a:r>
+              <a:rPr sz="1500" b="0">
+                <a:solidFill>
+                  <a:srgbClr val="3E4C59"/>
+                </a:solidFill>
+                <a:latin typeface="Calibri"/>
+              </a:rPr>
+              <a:t>•   Задаются период, список камер и строгость сходства — чем строже, тем меньше лишнего в ответе.</a:t>
+            </a:r>
+          </a:p>
+          <a:p>
+            <a:pPr algn="l" marL="237744" indent="-237744">
+              <a:lnSpc>
+                <a:spcPct val="112000"/>
+              </a:lnSpc>
+              <a:spcBef>
+                <a:spcPts val="0"/>
+              </a:spcBef>
+              <a:spcAft>
+                <a:spcPts val="1100"/>
+              </a:spcAft>
+            </a:pPr>
+            <a:r>
+              <a:rPr sz="1500" b="0">
+                <a:solidFill>
+                  <a:srgbClr val="3E4C59"/>
+                </a:solidFill>
+                <a:latin typeface="Calibri"/>
+              </a:rPr>
+              <a:t>•   Каждое найденное появление открывается в архиве одним щелчком, ровно на этом моменте.</a:t>
+            </a:r>
+          </a:p>
+          <a:p>
+            <a:pPr algn="l" marL="237744" indent="-237744">
+              <a:lnSpc>
+                <a:spcPct val="112000"/>
+              </a:lnSpc>
+              <a:spcBef>
+                <a:spcPts val="0"/>
+              </a:spcBef>
+              <a:spcAft>
+                <a:spcPts val="1100"/>
+              </a:spcAft>
+            </a:pPr>
+            <a:r>
+              <a:rPr sz="1500" b="0">
+                <a:solidFill>
+                  <a:srgbClr val="3E4C59"/>
+                </a:solidFill>
+                <a:latin typeface="Calibri"/>
+              </a:rPr>
+              <a:t>•   Это подсказка, а не опознание: система показывает похожих, решение остаётся за человеком.</a:t>
+            </a:r>
+          </a:p>
+        </p:txBody>
+      </p:sp>
+      <p:sp>
+        <p:nvSpPr>
+          <p:cNvPr id="5" name="TextBox 4"/>
+          <p:cNvSpPr txBox="1"/>
+          <p:nvPr/>
+        </p:nvSpPr>
+        <p:spPr>
+          <a:xfrm>
+            <a:off x="685800" y="6355080"/>
+            <a:ext cx="10820095" cy="274320"/>
+          </a:xfrm>
+          <a:prstGeom prst="rect">
+            <a:avLst/>
+          </a:prstGeom>
+          <a:noFill/>
+        </p:spPr>
+        <p:txBody>
+          <a:bodyPr wrap="square" lIns="0" rIns="0" tIns="0" bIns="0" anchor="t">
+            <a:spAutoFit/>
+          </a:bodyPr>
+          <a:lstStyle/>
+          <a:p>
+            <a:pPr algn="l">
+              <a:lnSpc>
+                <a:spcPct val="100000"/>
+              </a:lnSpc>
+              <a:spcBef>
+                <a:spcPts val="0"/>
+              </a:spcBef>
+              <a:spcAft>
+                <a:spcPts val="0"/>
+              </a:spcAft>
+            </a:pPr>
+            <a:r>
+              <a:rPr sz="900" b="0">
+                <a:solidFill>
+                  <a:srgbClr val="7B8794"/>
+                </a:solidFill>
+                <a:latin typeface="Calibri"/>
+              </a:rPr>
+              <a:t>TreeAlarm VMS · treealarm.dev</a:t>
+            </a:r>
+          </a:p>
+        </p:txBody>
+      </p:sp>
+      <p:sp>
+        <p:nvSpPr>
+          <p:cNvPr id="6" name="TextBox 5"/>
+          <p:cNvSpPr txBox="1"/>
+          <p:nvPr/>
+        </p:nvSpPr>
+        <p:spPr>
+          <a:xfrm>
+            <a:off x="10591495" y="6355080"/>
+            <a:ext cx="914400" cy="274320"/>
+          </a:xfrm>
+          <a:prstGeom prst="rect">
+            <a:avLst/>
+          </a:prstGeom>
+          <a:noFill/>
+        </p:spPr>
+        <p:txBody>
+          <a:bodyPr wrap="square" lIns="0" rIns="0" tIns="0" bIns="0" anchor="t">
+            <a:spAutoFit/>
+          </a:bodyPr>
+          <a:lstStyle/>
+          <a:p>
+            <a:pPr algn="r">
+              <a:lnSpc>
+                <a:spcPct val="100000"/>
+              </a:lnSpc>
+              <a:spcBef>
+                <a:spcPts val="0"/>
+              </a:spcBef>
+              <a:spcAft>
+                <a:spcPts val="0"/>
+              </a:spcAft>
+            </a:pPr>
+            <a:r>
+              <a:rPr sz="900" b="0">
+                <a:solidFill>
+                  <a:srgbClr val="7B8794"/>
+                </a:solidFill>
+                <a:latin typeface="Calibri"/>
+              </a:rPr>
+              <a:t>14</a:t>
             </a:r>
           </a:p>
         </p:txBody>
@@ -14011,7 +14895,7 @@
                 </a:solidFill>
                 <a:latin typeface="Calibri"/>
               </a:rPr>
-              <a:t>•   Экран делится на 2, 4, 6, 8 или 9 окошек — как удобно смотреть. Набор камер задаёт администратор, оператор просто открывает готовый экран.</a:t>
+              <a:t>•   Экран делится на 2, 4, 6, 8, 9, 12 или 16 окошек — как удобно смотреть. Набор камер задаёт администратор, оператор просто открывает готовый экран.</a:t>
             </a:r>
           </a:p>
           <a:p>
@@ -14078,6 +14962,28 @@
                 <a:latin typeface="Calibri"/>
               </a:rPr>
               <a:t>•   Каждый сотрудник может собрать себе временный экран из нужных камер для разбора происшествия и передать его коллеге.</a:t>
+            </a:r>
+          </a:p>
+          <a:p>
+            <a:pPr algn="l" marL="237744" indent="-237744">
+              <a:lnSpc>
+                <a:spcPct val="112000"/>
+              </a:lnSpc>
+              <a:spcBef>
+                <a:spcPts val="0"/>
+              </a:spcBef>
+              <a:spcAft>
+                <a:spcPts val="1100"/>
+              </a:spcAft>
+            </a:pPr>
+            <a:r>
+              <a:rPr sz="1450" b="0">
+                <a:solidFill>
+                  <a:srgbClr val="3E4C59"/>
+                </a:solidFill>
+                <a:latin typeface="Calibri"/>
+              </a:rPr>
+              <a:t>•   Каждое окошко берёт с камеры поток под свой размер, поэтому даже стена из шестнадцати камер не захлёбывается.</a:t>
             </a:r>
           </a:p>
         </p:txBody>
@@ -14588,7 +15494,7 @@
                 </a:solidFill>
                 <a:latin typeface="Calibri"/>
               </a:rPr>
-              <a:t>7</a:t>
+              <a:t>8</a:t>
             </a:r>
           </a:p>
         </p:txBody>
@@ -15009,7 +15915,7 @@
                 </a:solidFill>
                 <a:latin typeface="Calibri"/>
               </a:rPr>
-              <a:t>8</a:t>
+              <a:t>9</a:t>
             </a:r>
           </a:p>
         </p:txBody>
@@ -15408,7 +16314,7 @@
                 </a:solidFill>
                 <a:latin typeface="Calibri"/>
               </a:rPr>
-              <a:t>9</a:t>
+              <a:t>10</a:t>
             </a:r>
           </a:p>
         </p:txBody>

--- a/docs/TreeAlarm-VMS-2026-ru.pptx
+++ b/docs/TreeAlarm-VMS-2026-ru.pptx
@@ -12,6 +12,8 @@
     <p:sldId id="260" r:id="rId11"/>
     <p:sldId id="261" r:id="rId12"/>
     <p:sldId id="288" r:id="rId39"/>
+    <p:sldId id="290" r:id="rId41"/>
+    <p:sldId id="291" r:id="rId42"/>
     <p:sldId id="262" r:id="rId13"/>
     <p:sldId id="263" r:id="rId14"/>
     <p:sldId id="264" r:id="rId15"/>
@@ -3407,7 +3409,7 @@
                 </a:solidFill>
                 <a:latin typeface="Calibri"/>
               </a:rPr>
-              <a:t>Обзор системы · новое: камера сама ведёт объект · поиск человека по всем камерам · экономия места на дисках · связь с картой мониторинга TreeAlarm · 2026</a:t>
+              <a:t>Обзор системы · новое: камеры на карте объекта · камера сама ведёт объект · поиск человека по всем камерам · экономия места на дисках · связь с картой мониторинга TreeAlarm · 2026</a:t>
             </a:r>
           </a:p>
         </p:txBody>
@@ -3737,7 +3739,7 @@
                 </a:solidFill>
                 <a:latin typeface="Calibri"/>
               </a:rPr>
-              <a:t>11</a:t>
+              <a:t>13</a:t>
             </a:r>
           </a:p>
         </p:txBody>
@@ -4180,7 +4182,7 @@
                 </a:solidFill>
                 <a:latin typeface="Calibri"/>
               </a:rPr>
-              <a:t>12</a:t>
+              <a:t>14</a:t>
             </a:r>
           </a:p>
         </p:txBody>
@@ -4488,7 +4490,7 @@
                 </a:solidFill>
                 <a:latin typeface="Calibri"/>
               </a:rPr>
-              <a:t>13</a:t>
+              <a:t>15</a:t>
             </a:r>
           </a:p>
         </p:txBody>
@@ -4887,7 +4889,7 @@
                 </a:solidFill>
                 <a:latin typeface="Calibri"/>
               </a:rPr>
-              <a:t>15</a:t>
+              <a:t>17</a:t>
             </a:r>
           </a:p>
         </p:txBody>
@@ -5286,7 +5288,7 @@
                 </a:solidFill>
                 <a:latin typeface="Calibri"/>
               </a:rPr>
-              <a:t>16</a:t>
+              <a:t>18</a:t>
             </a:r>
           </a:p>
         </p:txBody>
@@ -5572,7 +5574,7 @@
                 </a:solidFill>
                 <a:latin typeface="Calibri"/>
               </a:rPr>
-              <a:t>17</a:t>
+              <a:t>19</a:t>
             </a:r>
           </a:p>
         </p:txBody>
@@ -5880,7 +5882,7 @@
                 </a:solidFill>
                 <a:latin typeface="Calibri"/>
               </a:rPr>
-              <a:t>18</a:t>
+              <a:t>20</a:t>
             </a:r>
           </a:p>
         </p:txBody>
@@ -6429,7 +6431,7 @@
                 </a:solidFill>
                 <a:latin typeface="Calibri"/>
               </a:rPr>
-              <a:t>20</a:t>
+              <a:t>22</a:t>
             </a:r>
           </a:p>
         </p:txBody>
@@ -7266,7 +7268,7 @@
                 </a:solidFill>
                 <a:latin typeface="Calibri"/>
               </a:rPr>
-              <a:t>21</a:t>
+              <a:t>23</a:t>
             </a:r>
           </a:p>
         </p:txBody>
@@ -7462,6 +7464,28 @@
                 </a:solidFill>
                 <a:latin typeface="Calibri"/>
               </a:rPr>
+              <a:t>•   Новое: камеры на карте объекта и на поэтажных планах, а поворотная камера сама следит за тем, что видит обзорная.</a:t>
+            </a:r>
+          </a:p>
+          <a:p>
+            <a:pPr algn="l" marL="237744" indent="-237744">
+              <a:lnSpc>
+                <a:spcPct val="112000"/>
+              </a:lnSpc>
+              <a:spcBef>
+                <a:spcPts val="0"/>
+              </a:spcBef>
+              <a:spcAft>
+                <a:spcPts val="1100"/>
+              </a:spcAft>
+            </a:pPr>
+            <a:r>
+              <a:rPr sz="1600" b="0">
+                <a:solidFill>
+                  <a:srgbClr val="3E4C59"/>
+                </a:solidFill>
+                <a:latin typeface="Calibri"/>
+              </a:rPr>
               <a:t>•   Новое: архив ужимается сам — важное в кадре остаётся чётким, а места нужно заметно меньше.</a:t>
             </a:r>
           </a:p>
@@ -7973,7 +7997,7 @@
                 </a:solidFill>
                 <a:latin typeface="Calibri"/>
               </a:rPr>
-              <a:t>22</a:t>
+              <a:t>24</a:t>
             </a:r>
           </a:p>
         </p:txBody>
@@ -8372,7 +8396,7 @@
                 </a:solidFill>
                 <a:latin typeface="Calibri"/>
               </a:rPr>
-              <a:t>23</a:t>
+              <a:t>25</a:t>
             </a:r>
           </a:p>
         </p:txBody>
@@ -8680,7 +8704,7 @@
                 </a:solidFill>
                 <a:latin typeface="Calibri"/>
               </a:rPr>
-              <a:t>24</a:t>
+              <a:t>26</a:t>
             </a:r>
           </a:p>
         </p:txBody>
@@ -9342,7 +9366,7 @@
                 </a:solidFill>
                 <a:latin typeface="Calibri"/>
               </a:rPr>
-              <a:t>26</a:t>
+              <a:t>28</a:t>
             </a:r>
           </a:p>
         </p:txBody>
@@ -9832,7 +9856,7 @@
                 </a:solidFill>
                 <a:latin typeface="Calibri"/>
               </a:rPr>
-              <a:t>27</a:t>
+              <a:t>29</a:t>
             </a:r>
           </a:p>
         </p:txBody>
@@ -10297,7 +10321,7 @@
                 </a:solidFill>
                 <a:latin typeface="Calibri"/>
               </a:rPr>
-              <a:t>28</a:t>
+              <a:t>30</a:t>
             </a:r>
           </a:p>
         </p:txBody>
@@ -10627,7 +10651,7 @@
                 </a:solidFill>
                 <a:latin typeface="Calibri"/>
               </a:rPr>
-              <a:t>29</a:t>
+              <a:t>31</a:t>
             </a:r>
           </a:p>
         </p:txBody>
@@ -11326,7 +11350,7 @@
                 </a:solidFill>
                 <a:latin typeface="Calibri"/>
               </a:rPr>
-              <a:t>30</a:t>
+              <a:t>32</a:t>
             </a:r>
           </a:p>
         </p:txBody>
@@ -11930,7 +11954,7 @@
         </p:nvGraphicFramePr>
         <p:xfrm>
           <a:off x="685800" y="1572768"/>
-          <a:ext cx="10820095" cy="3511296"/>
+          <a:ext cx="10820095" cy="3950208"/>
         </p:xfrm>
         <a:graphic>
           <a:graphicData uri="http://schemas.openxmlformats.org/drawingml/2006/table">
@@ -11970,7 +11994,7 @@
                       </a:r>
                     </a:p>
                   </a:txBody>
-                  <a:tcPr marL="146304" marR="146304" marT="64008" marB="64008" anchor="ctr">
+                  <a:tcPr marL="146304" marR="146304" marT="27432" marB="27432" anchor="ctr">
                     <a:solidFill>
                       <a:srgbClr val="F5F7FA"/>
                     </a:solidFill>
@@ -12003,7 +12027,7 @@
                       </a:r>
                     </a:p>
                   </a:txBody>
-                  <a:tcPr marL="146304" marR="146304" marT="64008" marB="64008" anchor="ctr">
+                  <a:tcPr marL="146304" marR="146304" marT="27432" marB="27432" anchor="ctr">
                     <a:solidFill>
                       <a:srgbClr val="F5F7FA"/>
                     </a:solidFill>
@@ -12038,7 +12062,7 @@
                       </a:r>
                     </a:p>
                   </a:txBody>
-                  <a:tcPr marL="146304" marR="146304" marT="64008" marB="64008" anchor="ctr">
+                  <a:tcPr marL="146304" marR="146304" marT="27432" marB="27432" anchor="ctr">
                     <a:solidFill>
                       <a:srgbClr val="FFFFFF"/>
                     </a:solidFill>
@@ -12071,7 +12095,7 @@
                       </a:r>
                     </a:p>
                   </a:txBody>
-                  <a:tcPr marL="146304" marR="146304" marT="64008" marB="64008" anchor="ctr">
+                  <a:tcPr marL="146304" marR="146304" marT="27432" marB="27432" anchor="ctr">
                     <a:solidFill>
                       <a:srgbClr val="FFFFFF"/>
                     </a:solidFill>
@@ -12106,7 +12130,7 @@
                       </a:r>
                     </a:p>
                   </a:txBody>
-                  <a:tcPr marL="146304" marR="146304" marT="64008" marB="64008" anchor="ctr">
+                  <a:tcPr marL="146304" marR="146304" marT="27432" marB="27432" anchor="ctr">
                     <a:solidFill>
                       <a:srgbClr val="F5F7FA"/>
                     </a:solidFill>
@@ -12139,7 +12163,7 @@
                       </a:r>
                     </a:p>
                   </a:txBody>
-                  <a:tcPr marL="146304" marR="146304" marT="64008" marB="64008" anchor="ctr">
+                  <a:tcPr marL="146304" marR="146304" marT="27432" marB="27432" anchor="ctr">
                     <a:solidFill>
                       <a:srgbClr val="F5F7FA"/>
                     </a:solidFill>
@@ -12174,7 +12198,7 @@
                       </a:r>
                     </a:p>
                   </a:txBody>
-                  <a:tcPr marL="146304" marR="146304" marT="64008" marB="64008" anchor="ctr">
+                  <a:tcPr marL="146304" marR="146304" marT="27432" marB="27432" anchor="ctr">
                     <a:solidFill>
                       <a:srgbClr val="FFFFFF"/>
                     </a:solidFill>
@@ -12207,7 +12231,7 @@
                       </a:r>
                     </a:p>
                   </a:txBody>
-                  <a:tcPr marL="146304" marR="146304" marT="64008" marB="64008" anchor="ctr">
+                  <a:tcPr marL="146304" marR="146304" marT="27432" marB="27432" anchor="ctr">
                     <a:solidFill>
                       <a:srgbClr val="FFFFFF"/>
                     </a:solidFill>
@@ -12242,7 +12266,7 @@
                       </a:r>
                     </a:p>
                   </a:txBody>
-                  <a:tcPr marL="146304" marR="146304" marT="64008" marB="64008" anchor="ctr">
+                  <a:tcPr marL="146304" marR="146304" marT="27432" marB="27432" anchor="ctr">
                     <a:solidFill>
                       <a:srgbClr val="F5F7FA"/>
                     </a:solidFill>
@@ -12275,7 +12299,7 @@
                       </a:r>
                     </a:p>
                   </a:txBody>
-                  <a:tcPr marL="146304" marR="146304" marT="64008" marB="64008" anchor="ctr">
+                  <a:tcPr marL="146304" marR="146304" marT="27432" marB="27432" anchor="ctr">
                     <a:solidFill>
                       <a:srgbClr val="F5F7FA"/>
                     </a:solidFill>
@@ -12310,7 +12334,7 @@
                       </a:r>
                     </a:p>
                   </a:txBody>
-                  <a:tcPr marL="146304" marR="146304" marT="64008" marB="64008" anchor="ctr">
+                  <a:tcPr marL="146304" marR="146304" marT="27432" marB="27432" anchor="ctr">
                     <a:solidFill>
                       <a:srgbClr val="FFFFFF"/>
                     </a:solidFill>
@@ -12343,7 +12367,7 @@
                       </a:r>
                     </a:p>
                   </a:txBody>
-                  <a:tcPr marL="146304" marR="146304" marT="64008" marB="64008" anchor="ctr">
+                  <a:tcPr marL="146304" marR="146304" marT="27432" marB="27432" anchor="ctr">
                     <a:solidFill>
                       <a:srgbClr val="FFFFFF"/>
                     </a:solidFill>
@@ -12378,7 +12402,7 @@
                       </a:r>
                     </a:p>
                   </a:txBody>
-                  <a:tcPr marL="146304" marR="146304" marT="64008" marB="64008" anchor="ctr">
+                  <a:tcPr marL="146304" marR="146304" marT="27432" marB="27432" anchor="ctr">
                     <a:solidFill>
                       <a:srgbClr val="F5F7FA"/>
                     </a:solidFill>
@@ -12411,7 +12435,7 @@
                       </a:r>
                     </a:p>
                   </a:txBody>
-                  <a:tcPr marL="146304" marR="146304" marT="64008" marB="64008" anchor="ctr">
+                  <a:tcPr marL="146304" marR="146304" marT="27432" marB="27432" anchor="ctr">
                     <a:solidFill>
                       <a:srgbClr val="F5F7FA"/>
                     </a:solidFill>
@@ -12446,7 +12470,7 @@
                       </a:r>
                     </a:p>
                   </a:txBody>
-                  <a:tcPr marL="146304" marR="146304" marT="64008" marB="64008" anchor="ctr">
+                  <a:tcPr marL="146304" marR="146304" marT="27432" marB="27432" anchor="ctr">
                     <a:solidFill>
                       <a:srgbClr val="F5F7FA"/>
                     </a:solidFill>
@@ -12479,7 +12503,75 @@
                       </a:r>
                     </a:p>
                   </a:txBody>
-                  <a:tcPr marL="146304" marR="146304" marT="64008" marB="64008" anchor="ctr">
+                  <a:tcPr marL="146304" marR="146304" marT="27432" marB="27432" anchor="ctr">
+                    <a:solidFill>
+                      <a:srgbClr val="F5F7FA"/>
+                    </a:solidFill>
+                  </a:tcPr>
+                </a:tc>
+              </a:tr>
+              <a:tr h="438912">
+                <a:tc>
+                  <a:txBody>
+                    <a:bodyPr wrap="square"/>
+                    <a:lstStyle/>
+                    <a:p>
+                      <a:pPr algn="l">
+                        <a:lnSpc>
+                          <a:spcPct val="105000"/>
+                        </a:lnSpc>
+                        <a:spcBef>
+                          <a:spcPts val="0"/>
+                        </a:spcBef>
+                        <a:spcAft>
+                          <a:spcPts val="0"/>
+                        </a:spcAft>
+                      </a:pPr>
+                      <a:r>
+                        <a:rPr sz="1350" b="1">
+                          <a:solidFill>
+                            <a:srgbClr val="1F2933"/>
+                          </a:solidFill>
+                          <a:latin typeface="Calibri"/>
+                        </a:rPr>
+                        <a:t>Карты</a:t>
+                      </a:r>
+                    </a:p>
+                  </a:txBody>
+                  <a:tcPr marL="146304" marR="146304" marT="27432" marB="27432" anchor="ctr">
+                    <a:solidFill>
+                      <a:srgbClr val="F5F7FA"/>
+                    </a:solidFill>
+                  </a:tcPr>
+                </a:tc>
+                <a:tc>
+                  <a:txBody>
+                    <a:bodyPr wrap="square"/>
+                    <a:lstStyle/>
+                    <a:p>
+                      <a:pPr algn="l">
+                        <a:lnSpc>
+                          <a:spcPct val="105000"/>
+                        </a:lnSpc>
+                        <a:spcBef>
+                          <a:spcPts val="0"/>
+                        </a:spcBef>
+                        <a:spcAft>
+                          <a:spcPts val="0"/>
+                        </a:spcAft>
+                      </a:pPr>
+                      <a:r>
+                        <a:rPr sz="1300" b="0">
+                          <a:solidFill>
+                            <a:srgbClr val="3E4C59"/>
+                          </a:solidFill>
+                          <a:latin typeface="Calibri"/>
+                        </a:rPr>
+                        <a:t>OpenStreetMap или свой тайл-сервер через кэш шлюза; планы из любой картинки; PTZ и неподвижные камеры калибруются по ориентирам</a:t>
+                      </a:r>
+                    </a:p>
+                  </a:txBody>
+                  <a:tcPr marL="146304" marR="146304" marT="27432" marB="27432" anchor="ctr">
                     <a:solidFill>
                       <a:srgbClr val="F5F7FA"/>
                     </a:solidFill>
@@ -12620,7 +12712,7 @@
                 </a:solidFill>
                 <a:latin typeface="Calibri"/>
               </a:rPr>
-              <a:t>32</a:t>
+              <a:t>34</a:t>
             </a:r>
           </a:p>
         </p:txBody>
@@ -12972,7 +13064,7 @@
                 </a:solidFill>
                 <a:latin typeface="Calibri"/>
               </a:rPr>
-              <a:t>33</a:t>
+              <a:t>35</a:t>
             </a:r>
           </a:p>
         </p:txBody>
@@ -13146,7 +13238,7 @@
                 </a:solidFill>
                 <a:latin typeface="Calibri"/>
               </a:rPr>
-              <a:t>•   Новое: камера сама ведёт объект в кадре, человека или машину можно найти сразу по всем камерам, а архив занимает заметно меньше места — номер и лицо при этом остаются читаемыми.</a:t>
+              <a:t>•   Новое: камеры на карте объекта, камера сама ведёт объект в кадре, человека или машину можно найти сразу по всем камерам, а архив занимает заметно меньше места — номер и лицо при этом остаются читаемыми.</a:t>
             </a:r>
           </a:p>
           <a:p>
@@ -13401,7 +13493,7 @@
                 </a:solidFill>
                 <a:latin typeface="Calibri"/>
               </a:rPr>
-              <a:t>34</a:t>
+              <a:t>36</a:t>
             </a:r>
           </a:p>
         </p:txBody>
@@ -14083,7 +14175,849 @@
                 </a:solidFill>
                 <a:latin typeface="Calibri"/>
               </a:rPr>
-              <a:t>14</a:t>
+              <a:t>16</a:t>
+            </a:r>
+          </a:p>
+        </p:txBody>
+      </p:sp>
+    </p:spTree>
+  </p:cSld>
+  <p:clrMapOvr>
+    <a:masterClrMapping/>
+  </p:clrMapOvr>
+</p:sld>
+</file>
+
+<file path=ppt/slides/slide35.xml><?xml version="1.0" encoding="utf-8"?>
+<p:sld xmlns:a="http://schemas.openxmlformats.org/drawingml/2006/main" xmlns:p="http://schemas.openxmlformats.org/presentationml/2006/main" xmlns:r="http://schemas.openxmlformats.org/officeDocument/2006/relationships">
+  <p:cSld>
+    <p:spTree>
+      <p:nvGrpSpPr>
+        <p:cNvPr id="1" name=""/>
+        <p:cNvGrpSpPr/>
+        <p:nvPr/>
+      </p:nvGrpSpPr>
+      <p:grpSpPr/>
+      <p:sp>
+        <p:nvSpPr>
+          <p:cNvPr id="2" name="TextBox 1"/>
+          <p:cNvSpPr txBox="1"/>
+          <p:nvPr/>
+        </p:nvSpPr>
+        <p:spPr>
+          <a:xfrm>
+            <a:off x="685800" y="475488"/>
+            <a:ext cx="10820095" cy="868680"/>
+          </a:xfrm>
+          <a:prstGeom prst="rect">
+            <a:avLst/>
+          </a:prstGeom>
+          <a:noFill/>
+        </p:spPr>
+        <p:txBody>
+          <a:bodyPr wrap="square" lIns="0" rIns="0" tIns="0" bIns="0" anchor="t">
+            <a:spAutoFit/>
+          </a:bodyPr>
+          <a:lstStyle/>
+          <a:p>
+            <a:pPr algn="l">
+              <a:lnSpc>
+                <a:spcPct val="95000"/>
+              </a:lnSpc>
+              <a:spcBef>
+                <a:spcPts val="0"/>
+              </a:spcBef>
+              <a:spcAft>
+                <a:spcPts val="0"/>
+              </a:spcAft>
+            </a:pPr>
+            <a:r>
+              <a:rPr sz="3000" b="1">
+                <a:solidFill>
+                  <a:srgbClr val="1F2933"/>
+                </a:solidFill>
+                <a:latin typeface="Calibri"/>
+              </a:rPr>
+              <a:t>Камеры на карте объекта</a:t>
+            </a:r>
+          </a:p>
+        </p:txBody>
+      </p:sp>
+      <p:sp>
+        <p:nvSpPr>
+          <p:cNvPr id="3" name="Rectangle 2"/>
+          <p:cNvSpPr/>
+          <p:nvPr/>
+        </p:nvSpPr>
+        <p:spPr>
+          <a:xfrm>
+            <a:off x="685800" y="1243584"/>
+            <a:ext cx="1051560" cy="50292"/>
+          </a:xfrm>
+          <a:prstGeom prst="rect">
+            <a:avLst/>
+          </a:prstGeom>
+          <a:solidFill>
+            <a:srgbClr val="D6291E"/>
+          </a:solidFill>
+          <a:ln>
+            <a:noFill/>
+          </a:ln>
+          <a:effectLst/>
+        </p:spPr>
+        <p:style>
+          <a:lnRef idx="1">
+            <a:schemeClr val="accent1"/>
+          </a:lnRef>
+          <a:fillRef idx="3">
+            <a:schemeClr val="accent1"/>
+          </a:fillRef>
+          <a:effectRef idx="2">
+            <a:schemeClr val="accent1"/>
+          </a:effectRef>
+          <a:fontRef idx="minor">
+            <a:schemeClr val="lt1"/>
+          </a:fontRef>
+        </p:style>
+        <p:txBody>
+          <a:bodyPr rtlCol="0" anchor="ctr"/>
+          <a:lstStyle/>
+          <a:p>
+            <a:pPr algn="ctr"/>
+          </a:p>
+        </p:txBody>
+      </p:sp>
+      <p:sp>
+        <p:nvSpPr>
+          <p:cNvPr id="4" name="TextBox 3"/>
+          <p:cNvSpPr txBox="1"/>
+          <p:nvPr/>
+        </p:nvSpPr>
+        <p:spPr>
+          <a:xfrm>
+            <a:off x="685800" y="1572768"/>
+            <a:ext cx="5989320" cy="4690872"/>
+          </a:xfrm>
+          <a:prstGeom prst="rect">
+            <a:avLst/>
+          </a:prstGeom>
+          <a:noFill/>
+        </p:spPr>
+        <p:txBody>
+          <a:bodyPr wrap="square" lIns="0" rIns="0" tIns="0" bIns="0" anchor="ctr">
+            <a:spAutoFit/>
+          </a:bodyPr>
+          <a:lstStyle/>
+          <a:p>
+            <a:pPr algn="l" marL="237744" indent="-237744">
+              <a:lnSpc>
+                <a:spcPct val="112000"/>
+              </a:lnSpc>
+              <a:spcBef>
+                <a:spcPts val="0"/>
+              </a:spcBef>
+              <a:spcAft>
+                <a:spcPts val="1100"/>
+              </a:spcAft>
+            </a:pPr>
+            <a:r>
+              <a:rPr sz="1450" b="0">
+                <a:solidFill>
+                  <a:srgbClr val="3E4C59"/>
+                </a:solidFill>
+                <a:latin typeface="Calibri"/>
+              </a:rPr>
+              <a:t>•   Каждая камера стоит на карте там, где висит на самом деле, и видно, какой участок она охватывает. У здания могут быть свои планы, по этажам, — подойдёт любая картинка: поэтажный план, чертёж, снимок сверху.</a:t>
+            </a:r>
+          </a:p>
+          <a:p>
+            <a:pPr algn="l" marL="237744" indent="-237744">
+              <a:lnSpc>
+                <a:spcPct val="112000"/>
+              </a:lnSpc>
+              <a:spcBef>
+                <a:spcPts val="0"/>
+              </a:spcBef>
+              <a:spcAft>
+                <a:spcPts val="1100"/>
+              </a:spcAft>
+            </a:pPr>
+            <a:r>
+              <a:rPr sz="1450" b="0">
+                <a:solidFill>
+                  <a:srgbClr val="3E4C59"/>
+                </a:solidFill>
+                <a:latin typeface="Calibri"/>
+              </a:rPr>
+              <a:t>•   Щёлкните по камере — рядом с картой откроется живое видео с неё. Там же список недавних тревог, от каждой — один щелчок до её камеры.</a:t>
+            </a:r>
+          </a:p>
+          <a:p>
+            <a:pPr algn="l" marL="237744" indent="-237744">
+              <a:lnSpc>
+                <a:spcPct val="112000"/>
+              </a:lnSpc>
+              <a:spcBef>
+                <a:spcPts val="0"/>
+              </a:spcBef>
+              <a:spcAft>
+                <a:spcPts val="1100"/>
+              </a:spcAft>
+            </a:pPr>
+            <a:r>
+              <a:rPr sz="1450" b="0">
+                <a:solidFill>
+                  <a:srgbClr val="3E4C59"/>
+                </a:solidFill>
+                <a:latin typeface="Calibri"/>
+              </a:rPr>
+              <a:t>•   Людей, которых видит обзорная камера, карта показывает точками там, где они стоят, — того же цвета, что и рамка на видео.</a:t>
+            </a:r>
+          </a:p>
+          <a:p>
+            <a:pPr algn="l" marL="237744" indent="-237744">
+              <a:lnSpc>
+                <a:spcPct val="112000"/>
+              </a:lnSpc>
+              <a:spcBef>
+                <a:spcPts val="0"/>
+              </a:spcBef>
+              <a:spcAft>
+                <a:spcPts val="1100"/>
+              </a:spcAft>
+            </a:pPr>
+            <a:r>
+              <a:rPr sz="1450" b="0">
+                <a:solidFill>
+                  <a:srgbClr val="3E4C59"/>
+                </a:solidFill>
+                <a:latin typeface="Calibri"/>
+              </a:rPr>
+              <a:t>•   Щёлкните по месту на карте — поворотная камера развернётся туда.</a:t>
+            </a:r>
+          </a:p>
+        </p:txBody>
+      </p:sp>
+      <p:sp>
+        <p:nvSpPr>
+          <p:cNvPr id="5" name="Rectangle 4"/>
+          <p:cNvSpPr/>
+          <p:nvPr/>
+        </p:nvSpPr>
+        <p:spPr>
+          <a:xfrm>
+            <a:off x="7100316" y="1957101"/>
+            <a:ext cx="4437583" cy="2797492"/>
+          </a:xfrm>
+          <a:prstGeom prst="rect">
+            <a:avLst/>
+          </a:prstGeom>
+          <a:solidFill>
+            <a:srgbClr val="CBD2D9"/>
+          </a:solidFill>
+          <a:ln>
+            <a:noFill/>
+          </a:ln>
+          <a:effectLst/>
+        </p:spPr>
+        <p:style>
+          <a:lnRef idx="1">
+            <a:schemeClr val="accent1"/>
+          </a:lnRef>
+          <a:fillRef idx="3">
+            <a:schemeClr val="accent1"/>
+          </a:fillRef>
+          <a:effectRef idx="2">
+            <a:schemeClr val="accent1"/>
+          </a:effectRef>
+          <a:fontRef idx="minor">
+            <a:schemeClr val="lt1"/>
+          </a:fontRef>
+        </p:style>
+        <p:txBody>
+          <a:bodyPr rtlCol="0" anchor="ctr"/>
+          <a:lstStyle/>
+          <a:p>
+            <a:pPr algn="ctr"/>
+          </a:p>
+        </p:txBody>
+      </p:sp>
+      <p:pic>
+        <p:nvPicPr>
+          <p:cNvPr id="6" name="Picture 5" descr="Карта объекта: обзорная и поворотная камеры с участками, которые они видят, человек — точкой там, где стоит, и картинка поворотной камеры с ним."/>
+          <p:cNvPicPr>
+            <a:picLocks noChangeAspect="1"/>
+          </p:cNvPicPr>
+          <p:nvPr/>
+        </p:nvPicPr>
+        <p:blipFill>
+          <a:blip r:embed="rId2"/>
+          <a:stretch>
+            <a:fillRect/>
+          </a:stretch>
+        </p:blipFill>
+        <p:spPr>
+          <a:xfrm>
+            <a:off x="7132320" y="1989105"/>
+            <a:ext cx="4373575" cy="2733484"/>
+          </a:xfrm>
+          <a:prstGeom prst="rect">
+            <a:avLst/>
+          </a:prstGeom>
+        </p:spPr>
+      </p:pic>
+      <p:sp>
+        <p:nvSpPr>
+          <p:cNvPr id="7" name="TextBox 6"/>
+          <p:cNvSpPr txBox="1"/>
+          <p:nvPr/>
+        </p:nvSpPr>
+        <p:spPr>
+          <a:xfrm>
+            <a:off x="7132320" y="4923758"/>
+            <a:ext cx="4373575" cy="1280160"/>
+          </a:xfrm>
+          <a:prstGeom prst="rect">
+            <a:avLst/>
+          </a:prstGeom>
+          <a:noFill/>
+        </p:spPr>
+        <p:txBody>
+          <a:bodyPr wrap="square" lIns="0" rIns="0" tIns="0" bIns="0" anchor="t">
+            <a:spAutoFit/>
+          </a:bodyPr>
+          <a:lstStyle/>
+          <a:p>
+            <a:pPr algn="l">
+              <a:lnSpc>
+                <a:spcPct val="115000"/>
+              </a:lnSpc>
+              <a:spcBef>
+                <a:spcPts val="0"/>
+              </a:spcBef>
+              <a:spcAft>
+                <a:spcPts val="0"/>
+              </a:spcAft>
+            </a:pPr>
+            <a:r>
+              <a:rPr sz="1150" b="0">
+                <a:solidFill>
+                  <a:srgbClr val="7B8794"/>
+                </a:solidFill>
+                <a:latin typeface="Calibri"/>
+              </a:rPr>
+              <a:t>Карта объекта: обзорная и поворотная камеры с участками, которые они видят, человек — точкой там, где стоит, и картинка поворотной камеры с ним.</a:t>
+            </a:r>
+          </a:p>
+        </p:txBody>
+      </p:sp>
+      <p:sp>
+        <p:nvSpPr>
+          <p:cNvPr id="8" name="TextBox 7"/>
+          <p:cNvSpPr txBox="1"/>
+          <p:nvPr/>
+        </p:nvSpPr>
+        <p:spPr>
+          <a:xfrm>
+            <a:off x="685800" y="6355080"/>
+            <a:ext cx="10820095" cy="274320"/>
+          </a:xfrm>
+          <a:prstGeom prst="rect">
+            <a:avLst/>
+          </a:prstGeom>
+          <a:noFill/>
+        </p:spPr>
+        <p:txBody>
+          <a:bodyPr wrap="square" lIns="0" rIns="0" tIns="0" bIns="0" anchor="t">
+            <a:spAutoFit/>
+          </a:bodyPr>
+          <a:lstStyle/>
+          <a:p>
+            <a:pPr algn="l">
+              <a:lnSpc>
+                <a:spcPct val="100000"/>
+              </a:lnSpc>
+              <a:spcBef>
+                <a:spcPts val="0"/>
+              </a:spcBef>
+              <a:spcAft>
+                <a:spcPts val="0"/>
+              </a:spcAft>
+            </a:pPr>
+            <a:r>
+              <a:rPr sz="900" b="0">
+                <a:solidFill>
+                  <a:srgbClr val="7B8794"/>
+                </a:solidFill>
+                <a:latin typeface="Calibri"/>
+              </a:rPr>
+              <a:t>TreeAlarm VMS · treealarm.dev</a:t>
+            </a:r>
+          </a:p>
+        </p:txBody>
+      </p:sp>
+      <p:sp>
+        <p:nvSpPr>
+          <p:cNvPr id="9" name="TextBox 8"/>
+          <p:cNvSpPr txBox="1"/>
+          <p:nvPr/>
+        </p:nvSpPr>
+        <p:spPr>
+          <a:xfrm>
+            <a:off x="10591495" y="6355080"/>
+            <a:ext cx="914400" cy="274320"/>
+          </a:xfrm>
+          <a:prstGeom prst="rect">
+            <a:avLst/>
+          </a:prstGeom>
+          <a:noFill/>
+        </p:spPr>
+        <p:txBody>
+          <a:bodyPr wrap="square" lIns="0" rIns="0" tIns="0" bIns="0" anchor="t">
+            <a:spAutoFit/>
+          </a:bodyPr>
+          <a:lstStyle/>
+          <a:p>
+            <a:pPr algn="r">
+              <a:lnSpc>
+                <a:spcPct val="100000"/>
+              </a:lnSpc>
+              <a:spcBef>
+                <a:spcPts val="0"/>
+              </a:spcBef>
+              <a:spcAft>
+                <a:spcPts val="0"/>
+              </a:spcAft>
+            </a:pPr>
+            <a:r>
+              <a:rPr sz="900" b="0">
+                <a:solidFill>
+                  <a:srgbClr val="7B8794"/>
+                </a:solidFill>
+                <a:latin typeface="Calibri"/>
+              </a:rPr>
+              <a:t>8</a:t>
+            </a:r>
+          </a:p>
+        </p:txBody>
+      </p:sp>
+    </p:spTree>
+  </p:cSld>
+  <p:clrMapOvr>
+    <a:masterClrMapping/>
+  </p:clrMapOvr>
+</p:sld>
+</file>
+
+<file path=ppt/slides/slide36.xml><?xml version="1.0" encoding="utf-8"?>
+<p:sld xmlns:a="http://schemas.openxmlformats.org/drawingml/2006/main" xmlns:p="http://schemas.openxmlformats.org/presentationml/2006/main" xmlns:r="http://schemas.openxmlformats.org/officeDocument/2006/relationships">
+  <p:cSld>
+    <p:spTree>
+      <p:nvGrpSpPr>
+        <p:cNvPr id="1" name=""/>
+        <p:cNvGrpSpPr/>
+        <p:nvPr/>
+      </p:nvGrpSpPr>
+      <p:grpSpPr/>
+      <p:sp>
+        <p:nvSpPr>
+          <p:cNvPr id="2" name="TextBox 1"/>
+          <p:cNvSpPr txBox="1"/>
+          <p:nvPr/>
+        </p:nvSpPr>
+        <p:spPr>
+          <a:xfrm>
+            <a:off x="685800" y="475488"/>
+            <a:ext cx="10820095" cy="868680"/>
+          </a:xfrm>
+          <a:prstGeom prst="rect">
+            <a:avLst/>
+          </a:prstGeom>
+          <a:noFill/>
+        </p:spPr>
+        <p:txBody>
+          <a:bodyPr wrap="square" lIns="0" rIns="0" tIns="0" bIns="0" anchor="t">
+            <a:spAutoFit/>
+          </a:bodyPr>
+          <a:lstStyle/>
+          <a:p>
+            <a:pPr algn="l">
+              <a:lnSpc>
+                <a:spcPct val="95000"/>
+              </a:lnSpc>
+              <a:spcBef>
+                <a:spcPts val="0"/>
+              </a:spcBef>
+              <a:spcAft>
+                <a:spcPts val="0"/>
+              </a:spcAft>
+            </a:pPr>
+            <a:r>
+              <a:rPr sz="3000" b="1">
+                <a:solidFill>
+                  <a:srgbClr val="1F2933"/>
+                </a:solidFill>
+                <a:latin typeface="Calibri"/>
+              </a:rPr>
+              <a:t>Одна камера замечает, другая рассматривает</a:t>
+            </a:r>
+          </a:p>
+        </p:txBody>
+      </p:sp>
+      <p:sp>
+        <p:nvSpPr>
+          <p:cNvPr id="3" name="Rectangle 2"/>
+          <p:cNvSpPr/>
+          <p:nvPr/>
+        </p:nvSpPr>
+        <p:spPr>
+          <a:xfrm>
+            <a:off x="685800" y="1243584"/>
+            <a:ext cx="1051560" cy="50292"/>
+          </a:xfrm>
+          <a:prstGeom prst="rect">
+            <a:avLst/>
+          </a:prstGeom>
+          <a:solidFill>
+            <a:srgbClr val="D6291E"/>
+          </a:solidFill>
+          <a:ln>
+            <a:noFill/>
+          </a:ln>
+          <a:effectLst/>
+        </p:spPr>
+        <p:style>
+          <a:lnRef idx="1">
+            <a:schemeClr val="accent1"/>
+          </a:lnRef>
+          <a:fillRef idx="3">
+            <a:schemeClr val="accent1"/>
+          </a:fillRef>
+          <a:effectRef idx="2">
+            <a:schemeClr val="accent1"/>
+          </a:effectRef>
+          <a:fontRef idx="minor">
+            <a:schemeClr val="lt1"/>
+          </a:fontRef>
+        </p:style>
+        <p:txBody>
+          <a:bodyPr rtlCol="0" anchor="ctr"/>
+          <a:lstStyle/>
+          <a:p>
+            <a:pPr algn="ctr"/>
+          </a:p>
+        </p:txBody>
+      </p:sp>
+      <p:sp>
+        <p:nvSpPr>
+          <p:cNvPr id="4" name="TextBox 3"/>
+          <p:cNvSpPr txBox="1"/>
+          <p:nvPr/>
+        </p:nvSpPr>
+        <p:spPr>
+          <a:xfrm>
+            <a:off x="685800" y="1572768"/>
+            <a:ext cx="5989320" cy="4690872"/>
+          </a:xfrm>
+          <a:prstGeom prst="rect">
+            <a:avLst/>
+          </a:prstGeom>
+          <a:noFill/>
+        </p:spPr>
+        <p:txBody>
+          <a:bodyPr wrap="square" lIns="0" rIns="0" tIns="0" bIns="0" anchor="ctr">
+            <a:spAutoFit/>
+          </a:bodyPr>
+          <a:lstStyle/>
+          <a:p>
+            <a:pPr algn="l" marL="237744" indent="-237744">
+              <a:lnSpc>
+                <a:spcPct val="112000"/>
+              </a:lnSpc>
+              <a:spcBef>
+                <a:spcPts val="0"/>
+              </a:spcBef>
+              <a:spcAft>
+                <a:spcPts val="1100"/>
+              </a:spcAft>
+            </a:pPr>
+            <a:r>
+              <a:rPr sz="1450" b="0">
+                <a:solidFill>
+                  <a:srgbClr val="3E4C59"/>
+                </a:solidFill>
+                <a:latin typeface="Calibri"/>
+              </a:rPr>
+              <a:t>•   Обзорная камера следит за большим участком, а поворотная рядом с ней даёт крупный план. Как только обзорная видит человека, поворотная сама разворачивается к нему и держит его в кадре.</a:t>
+            </a:r>
+          </a:p>
+          <a:p>
+            <a:pPr algn="l" marL="237744" indent="-237744">
+              <a:lnSpc>
+                <a:spcPct val="112000"/>
+              </a:lnSpc>
+              <a:spcBef>
+                <a:spcPts val="0"/>
+              </a:spcBef>
+              <a:spcAft>
+                <a:spcPts val="1100"/>
+              </a:spcAft>
+            </a:pPr>
+            <a:r>
+              <a:rPr sz="1450" b="0">
+                <a:solidFill>
+                  <a:srgbClr val="3E4C59"/>
+                </a:solidFill>
+                <a:latin typeface="Calibri"/>
+              </a:rPr>
+              <a:t>•   Приближение — по расстоянию: чем дальше человек, тем сильнее камера приближает, поэтому он остаётся в кадре одного размера, даже уходя вдаль.</a:t>
+            </a:r>
+          </a:p>
+          <a:p>
+            <a:pPr algn="l" marL="237744" indent="-237744">
+              <a:lnSpc>
+                <a:spcPct val="112000"/>
+              </a:lnSpc>
+              <a:spcBef>
+                <a:spcPts val="0"/>
+              </a:spcBef>
+              <a:spcAft>
+                <a:spcPts val="1100"/>
+              </a:spcAft>
+            </a:pPr>
+            <a:r>
+              <a:rPr sz="1450" b="0">
+                <a:solidFill>
+                  <a:srgbClr val="3E4C59"/>
+                </a:solidFill>
+                <a:latin typeface="Calibri"/>
+              </a:rPr>
+              <a:t>•   Для настройки достаточно отметить на карте несколько ориентиров — угол, столб, люк, — ничего не измеряя. Каждую камеру настраивают один раз и отдельно, после чего любая пара работает вместе.</a:t>
+            </a:r>
+          </a:p>
+          <a:p>
+            <a:pPr algn="l" marL="237744" indent="-237744">
+              <a:lnSpc>
+                <a:spcPct val="112000"/>
+              </a:lnSpc>
+              <a:spcBef>
+                <a:spcPts val="0"/>
+              </a:spcBef>
+              <a:spcAft>
+                <a:spcPts val="1100"/>
+              </a:spcAft>
+            </a:pPr>
+            <a:r>
+              <a:rPr sz="1450" b="0">
+                <a:solidFill>
+                  <a:srgbClr val="3E4C59"/>
+                </a:solidFill>
+                <a:latin typeface="Calibri"/>
+              </a:rPr>
+              <a:t>•   Карта местности не обязательна: то же самое работает на плане, нарисованном поверх любой картинки, как здесь.</a:t>
+            </a:r>
+          </a:p>
+        </p:txBody>
+      </p:sp>
+      <p:sp>
+        <p:nvSpPr>
+          <p:cNvPr id="5" name="Rectangle 4"/>
+          <p:cNvSpPr/>
+          <p:nvPr/>
+        </p:nvSpPr>
+        <p:spPr>
+          <a:xfrm>
+            <a:off x="7100316" y="1957101"/>
+            <a:ext cx="4437583" cy="2797492"/>
+          </a:xfrm>
+          <a:prstGeom prst="rect">
+            <a:avLst/>
+          </a:prstGeom>
+          <a:solidFill>
+            <a:srgbClr val="CBD2D9"/>
+          </a:solidFill>
+          <a:ln>
+            <a:noFill/>
+          </a:ln>
+          <a:effectLst/>
+        </p:spPr>
+        <p:style>
+          <a:lnRef idx="1">
+            <a:schemeClr val="accent1"/>
+          </a:lnRef>
+          <a:fillRef idx="3">
+            <a:schemeClr val="accent1"/>
+          </a:fillRef>
+          <a:effectRef idx="2">
+            <a:schemeClr val="accent1"/>
+          </a:effectRef>
+          <a:fontRef idx="minor">
+            <a:schemeClr val="lt1"/>
+          </a:fontRef>
+        </p:style>
+        <p:txBody>
+          <a:bodyPr rtlCol="0" anchor="ctr"/>
+          <a:lstStyle/>
+          <a:p>
+            <a:pPr algn="ctr"/>
+          </a:p>
+        </p:txBody>
+      </p:sp>
+      <p:pic>
+        <p:nvPicPr>
+          <p:cNvPr id="6" name="Picture 5" descr="План поверх снимка сверху: участок обзорной камеры, человек — точкой, и поворотная камера, которая уже смотрит на него. Показано на OnvifSim, нашем симуляторе камер."/>
+          <p:cNvPicPr>
+            <a:picLocks noChangeAspect="1"/>
+          </p:cNvPicPr>
+          <p:nvPr/>
+        </p:nvPicPr>
+        <p:blipFill>
+          <a:blip r:embed="rId2"/>
+          <a:stretch>
+            <a:fillRect/>
+          </a:stretch>
+        </p:blipFill>
+        <p:spPr>
+          <a:xfrm>
+            <a:off x="7132320" y="1989105"/>
+            <a:ext cx="4373575" cy="2733484"/>
+          </a:xfrm>
+          <a:prstGeom prst="rect">
+            <a:avLst/>
+          </a:prstGeom>
+        </p:spPr>
+      </p:pic>
+      <p:sp>
+        <p:nvSpPr>
+          <p:cNvPr id="7" name="TextBox 6"/>
+          <p:cNvSpPr txBox="1"/>
+          <p:nvPr/>
+        </p:nvSpPr>
+        <p:spPr>
+          <a:xfrm>
+            <a:off x="7132320" y="4923758"/>
+            <a:ext cx="4373575" cy="1280160"/>
+          </a:xfrm>
+          <a:prstGeom prst="rect">
+            <a:avLst/>
+          </a:prstGeom>
+          <a:noFill/>
+        </p:spPr>
+        <p:txBody>
+          <a:bodyPr wrap="square" lIns="0" rIns="0" tIns="0" bIns="0" anchor="t">
+            <a:spAutoFit/>
+          </a:bodyPr>
+          <a:lstStyle/>
+          <a:p>
+            <a:pPr algn="l">
+              <a:lnSpc>
+                <a:spcPct val="115000"/>
+              </a:lnSpc>
+              <a:spcBef>
+                <a:spcPts val="0"/>
+              </a:spcBef>
+              <a:spcAft>
+                <a:spcPts val="0"/>
+              </a:spcAft>
+            </a:pPr>
+            <a:r>
+              <a:rPr sz="1150" b="0">
+                <a:solidFill>
+                  <a:srgbClr val="7B8794"/>
+                </a:solidFill>
+                <a:latin typeface="Calibri"/>
+              </a:rPr>
+              <a:t>План поверх снимка сверху: участок обзорной камеры, человек — точкой, и поворотная камера, которая уже смотрит на него. Показано на OnvifSim, нашем симуляторе камер.</a:t>
+            </a:r>
+          </a:p>
+        </p:txBody>
+      </p:sp>
+      <p:sp>
+        <p:nvSpPr>
+          <p:cNvPr id="8" name="TextBox 7"/>
+          <p:cNvSpPr txBox="1"/>
+          <p:nvPr/>
+        </p:nvSpPr>
+        <p:spPr>
+          <a:xfrm>
+            <a:off x="685800" y="6355080"/>
+            <a:ext cx="10820095" cy="274320"/>
+          </a:xfrm>
+          <a:prstGeom prst="rect">
+            <a:avLst/>
+          </a:prstGeom>
+          <a:noFill/>
+        </p:spPr>
+        <p:txBody>
+          <a:bodyPr wrap="square" lIns="0" rIns="0" tIns="0" bIns="0" anchor="t">
+            <a:spAutoFit/>
+          </a:bodyPr>
+          <a:lstStyle/>
+          <a:p>
+            <a:pPr algn="l">
+              <a:lnSpc>
+                <a:spcPct val="100000"/>
+              </a:lnSpc>
+              <a:spcBef>
+                <a:spcPts val="0"/>
+              </a:spcBef>
+              <a:spcAft>
+                <a:spcPts val="0"/>
+              </a:spcAft>
+            </a:pPr>
+            <a:r>
+              <a:rPr sz="900" b="0">
+                <a:solidFill>
+                  <a:srgbClr val="7B8794"/>
+                </a:solidFill>
+                <a:latin typeface="Calibri"/>
+              </a:rPr>
+              <a:t>TreeAlarm VMS · treealarm.dev</a:t>
+            </a:r>
+          </a:p>
+        </p:txBody>
+      </p:sp>
+      <p:sp>
+        <p:nvSpPr>
+          <p:cNvPr id="9" name="TextBox 8"/>
+          <p:cNvSpPr txBox="1"/>
+          <p:nvPr/>
+        </p:nvSpPr>
+        <p:spPr>
+          <a:xfrm>
+            <a:off x="10591495" y="6355080"/>
+            <a:ext cx="914400" cy="274320"/>
+          </a:xfrm>
+          <a:prstGeom prst="rect">
+            <a:avLst/>
+          </a:prstGeom>
+          <a:noFill/>
+        </p:spPr>
+        <p:txBody>
+          <a:bodyPr wrap="square" lIns="0" rIns="0" tIns="0" bIns="0" anchor="t">
+            <a:spAutoFit/>
+          </a:bodyPr>
+          <a:lstStyle/>
+          <a:p>
+            <a:pPr algn="r">
+              <a:lnSpc>
+                <a:spcPct val="100000"/>
+              </a:lnSpc>
+              <a:spcBef>
+                <a:spcPts val="0"/>
+              </a:spcBef>
+              <a:spcAft>
+                <a:spcPts val="0"/>
+              </a:spcAft>
+            </a:pPr>
+            <a:r>
+              <a:rPr sz="900" b="0">
+                <a:solidFill>
+                  <a:srgbClr val="7B8794"/>
+                </a:solidFill>
+                <a:latin typeface="Calibri"/>
+              </a:rPr>
+              <a:t>9</a:t>
             </a:r>
           </a:p>
         </p:txBody>
@@ -15494,7 +16428,7 @@
                 </a:solidFill>
                 <a:latin typeface="Calibri"/>
               </a:rPr>
-              <a:t>8</a:t>
+              <a:t>10</a:t>
             </a:r>
           </a:p>
         </p:txBody>
@@ -15915,7 +16849,7 @@
                 </a:solidFill>
                 <a:latin typeface="Calibri"/>
               </a:rPr>
-              <a:t>9</a:t>
+              <a:t>11</a:t>
             </a:r>
           </a:p>
         </p:txBody>
@@ -16314,7 +17248,7 @@
                 </a:solidFill>
                 <a:latin typeface="Calibri"/>
               </a:rPr>
-              <a:t>10</a:t>
+              <a:t>12</a:t>
             </a:r>
           </a:p>
         </p:txBody>
